--- a/ppt/Python02-Variables.pptx
+++ b/ppt/Python02-Variables.pptx
@@ -5588,15 +5588,6 @@
           <a:p>
             <a:endParaRPr lang="fr-FR" dirty="0"/>
           </a:p>
-          <a:p>
-            <a:endParaRPr lang="fr-FR" dirty="0"/>
-          </a:p>
-          <a:p>
-            <a:r>
-              <a:rPr lang="fr-FR" dirty="0"/>
-              <a:t>""" """ Commentaire multiligne</a:t>
-            </a:r>
-          </a:p>
         </p:txBody>
       </p:sp>
       <p:pic>
@@ -5617,30 +5608,6 @@
           <a:xfrm>
             <a:off x="5345519" y="1559645"/>
             <a:ext cx="2500363" cy="1293291"/>
-          </a:xfrm>
-          <a:prstGeom prst="rect">
-            <a:avLst/>
-          </a:prstGeom>
-        </p:spPr>
-      </p:pic>
-      <p:pic>
-        <p:nvPicPr>
-          <p:cNvPr id="5" name="Image 4"/>
-          <p:cNvPicPr>
-            <a:picLocks noChangeAspect="1"/>
-          </p:cNvPicPr>
-          <p:nvPr/>
-        </p:nvPicPr>
-        <p:blipFill>
-          <a:blip r:embed="rId3"/>
-          <a:stretch>
-            <a:fillRect/>
-          </a:stretch>
-        </p:blipFill>
-        <p:spPr>
-          <a:xfrm>
-            <a:off x="1171512" y="4725144"/>
-            <a:ext cx="5923441" cy="1440160"/>
           </a:xfrm>
           <a:prstGeom prst="rect">
             <a:avLst/>
